--- a/docs/slides/zk-agent-passport.pptx
+++ b/docs/slides/zk-agent-passport.pptx
@@ -4209,7 +4209,7 @@
                 <a:ea typeface="Arial" pitchFamily="34" charset="-122"/>
                 <a:cs typeface="Arial" pitchFamily="34" charset="-120"/>
               </a:rPr>
-              <a:t>go run ./cmd/web　でブラウザデモ　·　go test ./...　で 27 ケース　·　go run ./cmd/bench　で計測</a:t>
+              <a:t>go run ./cmd/web　でブラウザデモ　·　go test ./...　で 31 ケース　·　go run ./cmd/bench　で計測</a:t>
             </a:r>
             <a:endParaRPr lang="en-US" sz="1200" dirty="0"/>
           </a:p>

--- a/docs/slides/zk-agent-passport.pptx
+++ b/docs/slides/zk-agent-passport.pptx
@@ -4209,7 +4209,7 @@
                 <a:ea typeface="Arial" pitchFamily="34" charset="-122"/>
                 <a:cs typeface="Arial" pitchFamily="34" charset="-120"/>
               </a:rPr>
-              <a:t>go run ./cmd/web　でブラウザデモ　·　go test ./...　で 31 ケース　·　go run ./cmd/bench　で計測</a:t>
+              <a:t>go run ./cmd/web　でブラウザデモ　·　go test ./...　で 32 ケース　·　go run ./cmd/bench　で計測</a:t>
             </a:r>
             <a:endParaRPr lang="en-US" sz="1200" dirty="0"/>
           </a:p>
